--- a/docs/architettura-integrazione.pptx
+++ b/docs/architettura-integrazione.pptx
@@ -4201,7 +4201,7 @@
             </a:pPr>
             <a:r>
               <a:rPr sz="1200" b="0"/>
-              <a:t>•  mode manual · rc all 1500 · arm throttle → 8 s in piedi</a:t>
+              <a:t>•  mode manual · rc all 1500 · arm throttle → 6 s in piedi</a:t>
             </a:r>
           </a:p>
           <a:p>
@@ -4212,7 +4212,7 @@
             </a:pPr>
             <a:r>
               <a:rPr sz="1200" b="0"/>
-              <a:t>•  rc 2 2000 → avanti 12 s (≈2.6 m)</a:t>
+              <a:t>•  rc 2 2000 → avanti 3 s · rc 2 1000 → indietro 2 s</a:t>
             </a:r>
           </a:p>
           <a:p>
@@ -4223,7 +4223,7 @@
             </a:pPr>
             <a:r>
               <a:rPr sz="1200" b="0"/>
-              <a:t>•  rc 1 1800 → laterale 8 s · rc 4 2000 → rotazione 8 s</a:t>
+              <a:t>•  rc 1 1800 → laterale 2 s · rc 4 2000 → rotazione 90° (integrale di ATTITUDE.yawspeed) · rc 2 2000 → avanti 5 s</a:t>
             </a:r>
           </a:p>
           <a:p>
@@ -4260,7 +4260,7 @@
             </a:pPr>
             <a:r>
               <a:rPr sz="1200" b="0"/>
-              <a:t>•  pannello a sinistra: comando MAVProxy e messaggio MAVLink corrispondente</a:t>
+              <a:t>•  box crediti e pannello a sinistra: comando MAVProxy e messaggio MAVLink corrispondente</a:t>
             </a:r>
           </a:p>
           <a:p>

--- a/docs/architettura-integrazione.pptx
+++ b/docs/architettura-integrazione.pptx
@@ -3826,7 +3826,7 @@
                             <a:srgbClr val="202020"/>
                           </a:solidFill>
                         </a:rPr>
-                        <a:t>policy_*.h in C, 0.3 ms su Mac</a:t>
+                        <a:t>policy_mlp.h in C, 0.37 ms su Mac</a:t>
                       </a:r>
                     </a:p>
                   </a:txBody>
@@ -3847,7 +3847,7 @@
                             <a:srgbClr val="202020"/>
                           </a:solidFill>
                         </a:rPr>
-                        <a:t>stessa sorgente; STM32H7: 1–2 ms stimati (MLP), Cartan da misurare</a:t>
+                        <a:t>stessa sorgente; STM32H7: 1–2 ms stimati (MLP)</a:t>
                       </a:r>
                     </a:p>
                   </a:txBody>
@@ -4190,7 +4190,7 @@
             </a:pPr>
             <a:r>
               <a:rPr sz="1200" b="0"/>
-              <a:t>•  param set MDK_POLICY 0|1 · param set MDK_ENABLE 1</a:t>
+              <a:t>•  param set MDK_POLICY 0 · param set MDK_ENABLE 1</a:t>
             </a:r>
           </a:p>
           <a:p>
@@ -4306,9 +4306,8 @@
                 <a:tableStyleId>{5C22544A-7EE6-4342-B048-85BDC9FD1C3A}</a:tableStyleId>
               </a:tblPr>
               <a:tblGrid>
-                <a:gridCol w="2560320"/>
-                <a:gridCol w="1371600"/>
-                <a:gridCol w="1371600"/>
+                <a:gridCol w="3200400"/>
+                <a:gridCol w="2103120"/>
               </a:tblGrid>
               <a:tr h="411480">
                 <a:tc>
@@ -4344,27 +4343,6 @@
                           </a:solidFill>
                         </a:rPr>
                         <a:t>MLP</a:t>
-                      </a:r>
-                    </a:p>
-                  </a:txBody>
-                  <a:tcPr>
-                    <a:solidFill>
-                      <a:srgbClr val="0D3B66"/>
-                    </a:solidFill>
-                  </a:tcPr>
-                </a:tc>
-                <a:tc>
-                  <a:txBody>
-                    <a:bodyPr/>
-                    <a:lstStyle/>
-                    <a:p>
-                      <a:r>
-                        <a:rPr sz="1200" b="1">
-                          <a:solidFill>
-                            <a:srgbClr val="FFFFFF"/>
-                          </a:solidFill>
-                        </a:rPr>
-                        <a:t>Cartan</a:t>
                       </a:r>
                     </a:p>
                   </a:txBody>
@@ -4418,27 +4396,6 @@
                     </a:solidFill>
                   </a:tcPr>
                 </a:tc>
-                <a:tc>
-                  <a:txBody>
-                    <a:bodyPr/>
-                    <a:lstStyle/>
-                    <a:p>
-                      <a:r>
-                        <a:rPr sz="1200" b="0">
-                          <a:solidFill>
-                            <a:srgbClr val="202020"/>
-                          </a:solidFill>
-                        </a:rPr>
-                        <a:t>6.0e-5</a:t>
-                      </a:r>
-                    </a:p>
-                  </a:txBody>
-                  <a:tcPr>
-                    <a:solidFill>
-                      <a:srgbClr val="FFFFFF"/>
-                    </a:solidFill>
-                  </a:tcPr>
-                </a:tc>
               </a:tr>
               <a:tr h="411480">
                 <a:tc>
@@ -4474,27 +4431,6 @@
                           </a:solidFill>
                         </a:rPr>
                         <a:t>2.5e-7</a:t>
-                      </a:r>
-                    </a:p>
-                  </a:txBody>
-                  <a:tcPr>
-                    <a:solidFill>
-                      <a:srgbClr val="F4F7FB"/>
-                    </a:solidFill>
-                  </a:tcPr>
-                </a:tc>
-                <a:tc>
-                  <a:txBody>
-                    <a:bodyPr/>
-                    <a:lstStyle/>
-                    <a:p>
-                      <a:r>
-                        <a:rPr sz="1200" b="0">
-                          <a:solidFill>
-                            <a:srgbClr val="202020"/>
-                          </a:solidFill>
-                        </a:rPr>
-                        <a:t>1.3e-6 (p99)</a:t>
                       </a:r>
                     </a:p>
                   </a:txBody>
@@ -4548,27 +4484,6 @@
                     </a:solidFill>
                   </a:tcPr>
                 </a:tc>
-                <a:tc>
-                  <a:txBody>
-                    <a:bodyPr/>
-                    <a:lstStyle/>
-                    <a:p>
-                      <a:r>
-                        <a:rPr sz="1200" b="0">
-                          <a:solidFill>
-                            <a:srgbClr val="202020"/>
-                          </a:solidFill>
-                        </a:rPr>
-                        <a:t>0.25 ms</a:t>
-                      </a:r>
-                    </a:p>
-                  </a:txBody>
-                  <a:tcPr>
-                    <a:solidFill>
-                      <a:srgbClr val="FFFFFF"/>
-                    </a:solidFill>
-                  </a:tcPr>
-                </a:tc>
               </a:tr>
               <a:tr h="411480">
                 <a:tc>
@@ -4613,27 +4528,6 @@
                     </a:solidFill>
                   </a:tcPr>
                 </a:tc>
-                <a:tc>
-                  <a:txBody>
-                    <a:bodyPr/>
-                    <a:lstStyle/>
-                    <a:p>
-                      <a:r>
-                        <a:rPr sz="1200" b="0">
-                          <a:solidFill>
-                            <a:srgbClr val="202020"/>
-                          </a:solidFill>
-                        </a:rPr>
-                        <a:t>496 KB</a:t>
-                      </a:r>
-                    </a:p>
-                  </a:txBody>
-                  <a:tcPr>
-                    <a:solidFill>
-                      <a:srgbClr val="F4F7FB"/>
-                    </a:solidFill>
-                  </a:tcPr>
-                </a:tc>
               </a:tr>
               <a:tr h="411480">
                 <a:tc>
@@ -4648,27 +4542,6 @@
                           </a:solidFill>
                         </a:rPr>
                         <a:t>Batteria HIL 8 passi</a:t>
-                      </a:r>
-                    </a:p>
-                  </a:txBody>
-                  <a:tcPr>
-                    <a:solidFill>
-                      <a:srgbClr val="FFFFFF"/>
-                    </a:solidFill>
-                  </a:tcPr>
-                </a:tc>
-                <a:tc>
-                  <a:txBody>
-                    <a:bodyPr/>
-                    <a:lstStyle/>
-                    <a:p>
-                      <a:r>
-                        <a:rPr sz="1200" b="0">
-                          <a:solidFill>
-                            <a:srgbClr val="202020"/>
-                          </a:solidFill>
-                        </a:rPr>
-                        <a:t>8/8 PASS</a:t>
                       </a:r>
                     </a:p>
                   </a:txBody>
@@ -4743,27 +4616,6 @@
                     </a:solidFill>
                   </a:tcPr>
                 </a:tc>
-                <a:tc>
-                  <a:txBody>
-                    <a:bodyPr/>
-                    <a:lstStyle/>
-                    <a:p>
-                      <a:r>
-                        <a:rPr sz="1200" b="0">
-                          <a:solidFill>
-                            <a:srgbClr val="202020"/>
-                          </a:solidFill>
-                        </a:rPr>
-                        <a:t>—</a:t>
-                      </a:r>
-                    </a:p>
-                  </a:txBody>
-                  <a:tcPr>
-                    <a:solidFill>
-                      <a:srgbClr val="F4F7FB"/>
-                    </a:solidFill>
-                  </a:tcPr>
-                </a:tc>
               </a:tr>
             </a:tbl>
           </a:graphicData>
@@ -6403,7 +6255,7 @@
                   <a:srgbClr val="0D3B66"/>
                 </a:solidFill>
               </a:rPr>
-              <a:t>MLP | Cartan</a:t>
+              <a:t>MLP</a:t>
             </a:r>
           </a:p>
           <a:p>
@@ -6414,7 +6266,7 @@
                   <a:srgbClr val="0D3B66"/>
                 </a:solidFill>
               </a:rPr>
-              <a:t>≈0.3 ms</a:t>
+              <a:t>≈0.37 ms</a:t>
             </a:r>
           </a:p>
         </p:txBody>
@@ -8371,7 +8223,7 @@
                             <a:srgbClr val="202020"/>
                           </a:solidFill>
                         </a:rPr>
-                        <a:t>param set MDK_POLICY 1</a:t>
+                        <a:t>param set MDK_POLICY 0</a:t>
                       </a:r>
                     </a:p>
                   </a:txBody>
@@ -8434,7 +8286,7 @@
                             <a:srgbClr val="202020"/>
                           </a:solidFill>
                         </a:rPr>
-                        <a:t>prossimo tick usa la rete Cartan</a:t>
+                        <a:t>prossimo tick usa la rete MLP</a:t>
                       </a:r>
                     </a:p>
                   </a:txBody>
@@ -9561,7 +9413,7 @@
                             <a:srgbClr val="202020"/>
                           </a:solidFill>
                         </a:rPr>
-                        <a:t>AP_MicroDuck.{h,cpp}, microduck_infer.{h,c}, policy_mlp.h, policy_cartan.h, AP_MicroDuck_config.h</a:t>
+                        <a:t>AP_MicroDuck.{h,cpp}, microduck_infer.{h,c}, policy_mlp.h, AP_MicroDuck_config.h</a:t>
                       </a:r>
                     </a:p>
                   </a:txBody>
@@ -9947,7 +9799,7 @@
             <a:pPr algn="l"/>
             <a:r>
               <a:rPr sz="1300" b="0"/>
-              <a:t>Nessuna modifica a RC_Channels, SRV_Channel, AP_InertialSensor, AP_Arming, GCS_MAVLink: il task usa le loro API pubbliche. AP_MICRODUCK_ENABLED è 1 su SITL; le board devono abilitarlo (pesi ~770 KB + ~500 KB di flash in float32).</a:t>
+              <a:t>Nessuna modifica a RC_Channels, SRV_Channel, AP_InertialSensor, AP_Arming, GCS_MAVLink: il task usa le loro API pubbliche. AP_MICRODUCK_ENABLED è 1 su SITL; le board devono abilitarlo (pesi ~770 KB di flash in float32).</a:t>
             </a:r>
           </a:p>
           <a:p>
@@ -16290,7 +16142,7 @@
             </a:pPr>
             <a:r>
               <a:rPr sz="1200" b="0"/>
-              <a:t>•  Il task a 50 Hz vede 4 passi fisici per azione, come in training (decimation 4). Il forward dura 0.25–0.37 ms sul Mac; su STM32H7 stimati 1–2 ms.</a:t>
+              <a:t>•  Il task a 50 Hz vede 4 passi fisici per azione, come in training (decimation 4). Il forward dura ~0.37 ms sul Mac; su STM32H7 stimati 1–2 ms.</a:t>
             </a:r>
           </a:p>
         </p:txBody>
@@ -16651,7 +16503,7 @@
                   <a:srgbClr val="0D3B66"/>
                 </a:solidFill>
               </a:rPr>
-              <a:t>Gemm/ELU… o Cartan</a:t>
+              <a:t>Gemm/ELU</a:t>
             </a:r>
           </a:p>
         </p:txBody>
@@ -16704,7 +16556,7 @@
                   <a:srgbClr val="0D3B66"/>
                 </a:solidFill>
               </a:rPr>
-              <a:t>policy_*.h</a:t>
+              <a:t>policy_mlp.h</a:t>
             </a:r>
           </a:p>
           <a:p>
@@ -16737,7 +16589,7 @@
                   <a:srgbClr val="0D3B66"/>
                 </a:solidFill>
               </a:rPr>
-              <a:t>773 KB MLP / 496 KB Cartan</a:t>
+              <a:t>773 KB MLP</a:t>
             </a:r>
           </a:p>
         </p:txBody>
@@ -16812,7 +16664,7 @@
                   <a:srgbClr val="0D3B66"/>
                 </a:solidFill>
               </a:rPr>
-              <a:t>expf/logf, no heap</a:t>
+              <a:t>expf, no heap</a:t>
             </a:r>
           </a:p>
           <a:p>
@@ -17038,7 +16890,7 @@
                   <a:srgbClr val="555555"/>
                 </a:solidFill>
               </a:rPr>
-              <a:t>tools/export_*_c.py</a:t>
+              <a:t>tools/export_policy_c.py</a:t>
             </a:r>
           </a:p>
         </p:txBody>
@@ -17193,7 +17045,7 @@
             </a:pPr>
             <a:r>
               <a:rPr sz="1200" b="0"/>
-              <a:t>•  tools/parity_check.py: 2201 osservazioni → ONNX Runtime vs binario C: max 3.8e-6 (MLP), 6.0e-5 (Cartan)</a:t>
+              <a:t>•  tools/parity_check.py: 2201 osservazioni → ONNX Runtime vs binario C: max 3.8e-6 (MLP)</a:t>
             </a:r>
           </a:p>
           <a:p>
@@ -17230,7 +17082,7 @@
                   <a:srgbClr val="0D3B66"/>
                 </a:solidFill>
               </a:rPr>
-              <a:t>Le due reti (MDK_POLICY)</a:t>
+              <a:t>La rete (MDK_POLICY)</a:t>
             </a:r>
           </a:p>
           <a:p>
@@ -17242,17 +17094,6 @@
             <a:r>
               <a:rPr sz="1200" b="0"/>
               <a:t>•  0 = MLP 61→512→256→128→14 ELU, 197 896 parametri, 0.37 ms</a:t>
-            </a:r>
-          </a:p>
-          <a:p>
-            <a:pPr algn="l">
-              <a:spcBef>
-                <a:spcPts val="300"/>
-              </a:spcBef>
-            </a:pPr>
-            <a:r>
-              <a:rPr sz="1200" b="0"/>
-              <a:t>•  1 = Cartan+DiLU 61→192→3×CartanLinear→14, 127 054 parametri (−36 %), 0.25 ms, operatore con exp/log in C</a:t>
             </a:r>
           </a:p>
         </p:txBody>

--- a/docs/architettura-integrazione.pptx
+++ b/docs/architettura-integrazione.pptx
@@ -3127,7 +3127,7 @@
                   <a:srgbClr val="0D3B66"/>
                 </a:solidFill>
               </a:rPr>
-              <a:t>MicroDuck su ArduPilot</a:t>
+              <a:t>NNMixer su ArduPilot</a:t>
             </a:r>
           </a:p>
           <a:p>
@@ -3372,7 +3372,7 @@
                   <a:srgbClr val="555555"/>
                 </a:solidFill>
               </a:rPr>
-              <a:t>Solo il terzo processo: la pianta MuJoCo diventa il robot. AP_MicroDuck non cambia.</a:t>
+              <a:t>Solo il terzo processo: la pianta MuJoCo diventa il robot. AP_NNMixer non cambia.</a:t>
             </a:r>
           </a:p>
         </p:txBody>
@@ -4190,7 +4190,7 @@
             </a:pPr>
             <a:r>
               <a:rPr sz="1200" b="0"/>
-              <a:t>•  param set MDK_POLICY 0 · param set MDK_ENABLE 1</a:t>
+              <a:t>•  param set NNM_POLICY 0 · param set NNM_ENABLE 1</a:t>
             </a:r>
           </a:p>
           <a:p>
@@ -4958,7 +4958,7 @@
                   <a:srgbClr val="2E7D32"/>
                 </a:solidFill>
               </a:rPr>
-              <a:t>param set MDK_*</a:t>
+              <a:t>param set NNM_*</a:t>
             </a:r>
           </a:p>
           <a:p>
@@ -5077,7 +5077,7 @@
                   <a:srgbClr val="0D3B66"/>
                 </a:solidFill>
               </a:rPr>
-              <a:t>AP_MicroDuck: rete PPO 50 Hz</a:t>
+              <a:t>AP_NNMixer: rete PPO 50 Hz</a:t>
             </a:r>
           </a:p>
           <a:p>
@@ -5544,7 +5544,7 @@
                   <a:srgbClr val="D62728"/>
                 </a:solidFill>
               </a:rPr>
-              <a:t>Il task PPO non ha alcun collegamento con MuJoCo: vede solo API ArduPilot. Sostituire la pianta con IMU + bus Dynamixel reali non cambia una riga di AP_MicroDuck.</a:t>
+              <a:t>Il task PPO non ha alcun collegamento con MuJoCo: vede solo API ArduPilot. Sostituire la pianta con IMU + bus Dynamixel reali non cambia una riga di AP_NNMixer.</a:t>
             </a:r>
           </a:p>
         </p:txBody>
@@ -5596,7 +5596,7 @@
                   <a:srgbClr val="0D3B66"/>
                 </a:solidFill>
               </a:rPr>
-              <a:t>2. Dentro ArduRover: il loop a 50 Hz di AP_MicroDuck</a:t>
+              <a:t>2. Dentro ArduRover: il loop a 50 Hz di AP_NNMixer</a:t>
             </a:r>
           </a:p>
         </p:txBody>
@@ -6684,7 +6684,7 @@
             </a:pPr>
             <a:r>
               <a:rPr sz="1200" b="0"/>
-              <a:t>•  update_attitude() a loop rate: propaga la direzione della gravità col gyro, la corregge con l'accelerometro (MDK_ATT_TAU 0.5 s)</a:t>
+              <a:t>•  update_attitude() a loop rate: propaga la direzione della gravità col gyro, la corregge con l'accelerometro (NNM_ATT_TAU 0.5 s)</a:t>
             </a:r>
           </a:p>
           <a:p>
@@ -6706,7 +6706,7 @@
             </a:pPr>
             <a:r>
               <a:rPr sz="1200" b="0"/>
-              <a:t>•  Failsafe: disarmato, feedback giunti assente o vecchio &gt; MDK_WD_MS → azione 0 = posa stand (anche nella storia)</a:t>
+              <a:t>•  Failsafe: disarmato, feedback giunti assente o vecchio &gt; NNM_WD_MS → azione 0 = posa stand (anche nella storia)</a:t>
             </a:r>
           </a:p>
           <a:p>
@@ -6717,7 +6717,7 @@
             </a:pPr>
             <a:r>
               <a:rPr sz="1200" b="0"/>
-              <a:t>•  HOLD (MDK_HOLD_MODE 4) → twist 0</a:t>
+              <a:t>•  HOLD (NNM_HOLD_MODE 4) → twist 0</a:t>
             </a:r>
           </a:p>
           <a:p>
@@ -7228,7 +7228,7 @@
                   <a:srgbClr val="0D3B66"/>
                 </a:solidFill>
               </a:rPr>
-              <a:t>AP_MicroDuck</a:t>
+              <a:t>AP_NNMixer</a:t>
             </a:r>
           </a:p>
           <a:p>
@@ -7942,7 +7942,7 @@
                             <a:srgbClr val="202020"/>
                           </a:solidFill>
                         </a:rPr>
-                        <a:t>obs[48] vx = +1.0 × MDK_VX_MAX = 0.4 m/s</a:t>
+                        <a:t>obs[48] vx = +1.0 × NNM_VX_MAX = 0.4 m/s</a:t>
                       </a:r>
                     </a:p>
                   </a:txBody>
@@ -8200,7 +8200,7 @@
                             <a:srgbClr val="202020"/>
                           </a:solidFill>
                         </a:rPr>
-                        <a:t>MDK_HOLD_MODE → twist forzato a 0: sta fermo</a:t>
+                        <a:t>NNM_HOLD_MODE → twist forzato a 0: sta fermo</a:t>
                       </a:r>
                     </a:p>
                   </a:txBody>
@@ -8223,7 +8223,7 @@
                             <a:srgbClr val="202020"/>
                           </a:solidFill>
                         </a:rPr>
-                        <a:t>param set MDK_POLICY 0</a:t>
+                        <a:t>param set NNM_POLICY 0</a:t>
                       </a:r>
                     </a:p>
                   </a:txBody>
@@ -8423,7 +8423,7 @@
             </a:pPr>
             <a:r>
               <a:rPr sz="1300" b="0"/>
-              <a:t>Log DataFlash MDK / MDKQ / MDKV / MDKA: ogni tick con le 61 osservazioni e le 14 azioni → tools/log_parity.py le rigioca nell'ONNX (parità 2.5e-7).</a:t>
+              <a:t>Log DataFlash NNM / NNMQ / NNMV / NNMA: ogni tick con le 61 osservazioni e le 14 azioni → tools/log_parity.py le rigioca nell'ONNX (parità 2.5e-7).</a:t>
             </a:r>
           </a:p>
         </p:txBody>
@@ -8687,7 +8687,7 @@
                   <a:srgbClr val="0D3B66"/>
                 </a:solidFill>
               </a:rPr>
-              <a:t>clip ±MDK_ACT_MAX</a:t>
+              <a:t>clip ±NNM_ACT_MAX</a:t>
             </a:r>
           </a:p>
         </p:txBody>
@@ -9392,7 +9392,7 @@
                             <a:srgbClr val="202020"/>
                           </a:solidFill>
                         </a:rPr>
-                        <a:t>libraries/AP_MicroDuck/  (nuova)</a:t>
+                        <a:t>libraries/AP_NNMixer/  (nuova)</a:t>
                       </a:r>
                     </a:p>
                   </a:txBody>
@@ -9413,7 +9413,7 @@
                             <a:srgbClr val="202020"/>
                           </a:solidFill>
                         </a:rPr>
-                        <a:t>AP_MicroDuck.{h,cpp}, microduck_infer.{h,c}, policy_mlp.h, AP_MicroDuck_config.h</a:t>
+                        <a:t>AP_NNMixer.{h,cpp}, nnmixer_infer.{h,c}, policy_mlp.h, AP_NNMixer_config.h</a:t>
                       </a:r>
                     </a:p>
                   </a:txBody>
@@ -9434,7 +9434,7 @@
                             <a:srgbClr val="202020"/>
                           </a:solidFill>
                         </a:rPr>
-                        <a:t>il task: obs, filtro gravità, storia, stick, servo, MDK_*, log, telemetria; rete in C</a:t>
+                        <a:t>il task: obs, filtro gravità, storia, stick, servo, NNM_*, log, telemetria; rete in C</a:t>
                       </a:r>
                     </a:p>
                   </a:txBody>
@@ -9478,7 +9478,7 @@
                             <a:srgbClr val="202020"/>
                           </a:solidFill>
                         </a:rPr>
-                        <a:t>membro g2.microduck; AP_SUBGROUPINFO "MDK_" indice 63</a:t>
+                        <a:t>membro g2.nnmixer; AP_SUBGROUPINFO "NNM_" indice 63</a:t>
                       </a:r>
                     </a:p>
                   </a:txBody>
@@ -9499,7 +9499,7 @@
                             <a:srgbClr val="202020"/>
                           </a:solidFill>
                         </a:rPr>
-                        <a:t>parametri MDK_* visibili da GCS e salvati in EEPROM</a:t>
+                        <a:t>parametri NNM_* visibili da GCS e salvati in EEPROM</a:t>
                       </a:r>
                     </a:p>
                   </a:txBody>
@@ -9608,7 +9608,7 @@
                             <a:srgbClr val="202020"/>
                           </a:solidFill>
                         </a:rPr>
-                        <a:t>+ 'AP_MicroDuck'</a:t>
+                        <a:t>+ 'AP_NNMixer'</a:t>
                       </a:r>
                     </a:p>
                   </a:txBody>
@@ -9799,7 +9799,7 @@
             <a:pPr algn="l"/>
             <a:r>
               <a:rPr sz="1300" b="0"/>
-              <a:t>Nessuna modifica a RC_Channels, SRV_Channel, AP_InertialSensor, AP_Arming, GCS_MAVLink: il task usa le loro API pubbliche. AP_MICRODUCK_ENABLED è 1 su SITL; le board devono abilitarlo (pesi ~770 KB di flash in float32).</a:t>
+              <a:t>Nessuna modifica a RC_Channels, SRV_Channel, AP_InertialSensor, AP_Arming, GCS_MAVLink: il task usa le loro API pubbliche. AP_NNMIXER_ENABLED è 1 su SITL; le board devono abilitarlo (pesi ~770 KB di flash in float32).</a:t>
             </a:r>
           </a:p>
           <a:p>
@@ -9810,7 +9810,7 @@
             </a:pPr>
             <a:r>
               <a:rPr sz="1300" b="0"/>
-              <a:t>Parametri SITL (sitl/microduck.parm): SERVO1..14_FUNCTION 94..107, SERVOn_MIN/MAX 800/2200, SIM_RATE_HZ 200, SCHED_LOOP_RATE 200, INS_GYRO_FILTER 0, ARMING_CHECK 0, MDK_ENABLE 1.</a:t>
+              <a:t>Parametri SITL (sitl/nnmixer.parm): SERVO1..14_FUNCTION 94..107, SERVOn_MIN/MAX 800/2200, SIM_RATE_HZ 200, SCHED_LOOP_RATE 200, INS_GYRO_FILTER 0, ARMING_CHECK 0, NNM_ENABLE 1.</a:t>
             </a:r>
           </a:p>
         </p:txBody>
@@ -15400,7 +15400,7 @@
                   <a:srgbClr val="2E7D32"/>
                 </a:solidFill>
               </a:rPr>
-              <a:t>AP_MicroDuck::update  (20 ms)</a:t>
+              <a:t>AP_NNMixer::update  (20 ms)</a:t>
             </a:r>
           </a:p>
         </p:txBody>
@@ -16642,7 +16642,7 @@
                   <a:srgbClr val="0D3B66"/>
                 </a:solidFill>
               </a:rPr>
-              <a:t>microduck_infer.c</a:t>
+              <a:t>nnmixer_infer.c</a:t>
             </a:r>
           </a:p>
           <a:p>
@@ -16728,7 +16728,7 @@
                   <a:srgbClr val="0D3B66"/>
                 </a:solidFill>
               </a:rPr>
-              <a:t>AP_MicroDuck</a:t>
+              <a:t>AP_NNMixer</a:t>
             </a:r>
           </a:p>
           <a:p>
@@ -17082,7 +17082,7 @@
                   <a:srgbClr val="0D3B66"/>
                 </a:solidFill>
               </a:rPr>
-              <a:t>La rete (MDK_POLICY)</a:t>
+              <a:t>La rete (NNM_POLICY)</a:t>
             </a:r>
           </a:p>
           <a:p>
